--- a/generated/Tier 1 Broker Scorecards/Safeline Insurance Agency, Inc._Broker_Scorecard.pptx
+++ b/generated/Tier 1 Broker Scorecards/Safeline Insurance Agency, Inc._Broker_Scorecard.pptx
@@ -3357,7 +3357,7 @@
                         <a:rPr sz="800">
                           <a:latin typeface="Segoe UI"/>
                         </a:rPr>
-                        <a:t>$5,475,694.67 / $8,611,234.11 / $4,312,404.41</a:t>
+                        <a:t>$5,475,694.67 / $8,625,181.81 / $4,326,352.11</a:t>
                       </a:r>
                     </a:p>
                   </a:txBody>
@@ -3394,7 +3394,7 @@
                         <a:rPr sz="900">
                           <a:latin typeface="Segoe UI"/>
                         </a:rPr>
-                        <a:t>Tier 1  |  10.06% / 15.00%</a:t>
+                        <a:t>Tier 1  |  10.17% / 15.00%</a:t>
                       </a:r>
                     </a:p>
                   </a:txBody>
@@ -3431,7 +3431,7 @@
                         <a:rPr sz="900">
                           <a:latin typeface="Segoe UI"/>
                         </a:rPr>
-                        <a:t>$7,665,972.54  (56.3% achieved)</a:t>
+                        <a:t>$7,665,972.54  (56.4% achieved)</a:t>
                       </a:r>
                     </a:p>
                   </a:txBody>
@@ -3653,7 +3653,7 @@
                         <a:rPr sz="900">
                           <a:latin typeface="Segoe UI"/>
                         </a:rPr>
-                        <a:t>Fleet Subs: 69  |  Binds: 9</a:t>
+                        <a:t>Fleet Subs: 70  |  Binds: 10</a:t>
                       </a:r>
                     </a:p>
                   </a:txBody>
@@ -3690,7 +3690,7 @@
                         <a:rPr sz="900">
                           <a:latin typeface="Segoe UI"/>
                         </a:rPr>
-                        <a:t>Fleet Bound Premium: $1,645,236.54</a:t>
+                        <a:t>Fleet Bound Premium: $1,947,174.29</a:t>
                       </a:r>
                     </a:p>
                   </a:txBody>
@@ -3727,7 +3727,7 @@
                         <a:rPr sz="900">
                           <a:latin typeface="Segoe UI"/>
                         </a:rPr>
-                        <a:t>Fleet Book %: 38.2%</a:t>
+                        <a:t>Fleet Book %: 45.0%</a:t>
                       </a:r>
                     </a:p>
                   </a:txBody>
@@ -3766,7 +3766,7 @@
                         <a:rPr sz="900">
                           <a:latin typeface="Segoe UI"/>
                         </a:rPr>
-                        <a:t>Non-Fleet Subs: 577  |  Binds: 56</a:t>
+                        <a:t>Non-Fleet Subs: 579  |  Binds: 56</a:t>
                       </a:r>
                     </a:p>
                   </a:txBody>
@@ -3803,7 +3803,7 @@
                         <a:rPr sz="900">
                           <a:latin typeface="Segoe UI"/>
                         </a:rPr>
-                        <a:t>Non-Fleet Bound Premium: $2,667,167.87</a:t>
+                        <a:t>Non-Fleet Bound Premium: $2,379,177.82</a:t>
                       </a:r>
                     </a:p>
                   </a:txBody>
@@ -3840,7 +3840,7 @@
                         <a:rPr sz="900">
                           <a:latin typeface="Segoe UI"/>
                         </a:rPr>
-                        <a:t>Non-Fleet Book %: 61.8%</a:t>
+                        <a:t>Non-Fleet Book %: 55.0%</a:t>
                       </a:r>
                     </a:p>
                   </a:txBody>
@@ -4428,7 +4428,7 @@
                           </a:solidFill>
                           <a:latin typeface="Segoe UI"/>
                         </a:rPr>
-                        <a:t>98</a:t>
+                        <a:t>104</a:t>
                       </a:r>
                     </a:p>
                   </a:txBody>
@@ -4707,7 +4707,7 @@
                           </a:solidFill>
                           <a:latin typeface="Segoe UI"/>
                         </a:rPr>
-                        <a:t>11.2%</a:t>
+                        <a:t>11.5%</a:t>
                       </a:r>
                     </a:p>
                   </a:txBody>
@@ -4983,7 +4983,7 @@
                           </a:solidFill>
                           <a:latin typeface="Segoe UI"/>
                         </a:rPr>
-                        <a:t>11</a:t>
+                        <a:t>12</a:t>
                       </a:r>
                     </a:p>
                   </a:txBody>
@@ -5262,7 +5262,7 @@
                           </a:solidFill>
                           <a:latin typeface="Segoe UI"/>
                         </a:rPr>
-                        <a:t>$276.7K</a:t>
+                        <a:t>$290.7K</a:t>
                       </a:r>
                     </a:p>
                   </a:txBody>

--- a/generated/Tier 1 Broker Scorecards/Safeline Insurance Agency, Inc._Broker_Scorecard.pptx
+++ b/generated/Tier 1 Broker Scorecards/Safeline Insurance Agency, Inc._Broker_Scorecard.pptx
@@ -3394,7 +3394,7 @@
                         <a:rPr sz="900">
                           <a:latin typeface="Segoe UI"/>
                         </a:rPr>
-                        <a:t>Tier 1  |  10.17% / 15.00%</a:t>
+                        <a:t>Tier 1  |  10.38% / 15.00%</a:t>
                       </a:r>
                     </a:p>
                   </a:txBody>
@@ -3653,7 +3653,7 @@
                         <a:rPr sz="900">
                           <a:latin typeface="Segoe UI"/>
                         </a:rPr>
-                        <a:t>Fleet Subs: 70  |  Binds: 10</a:t>
+                        <a:t>Fleet Subs: 70  |  Binds: 12</a:t>
                       </a:r>
                     </a:p>
                   </a:txBody>
@@ -3690,7 +3690,7 @@
                         <a:rPr sz="900">
                           <a:latin typeface="Segoe UI"/>
                         </a:rPr>
-                        <a:t>Fleet Bound Premium: $1,947,174.29</a:t>
+                        <a:t>Fleet Bound Premium: $2,356,387.07</a:t>
                       </a:r>
                     </a:p>
                   </a:txBody>
@@ -3727,7 +3727,7 @@
                         <a:rPr sz="900">
                           <a:latin typeface="Segoe UI"/>
                         </a:rPr>
-                        <a:t>Fleet Book %: 45.0%</a:t>
+                        <a:t>Fleet Book %: 54.5%</a:t>
                       </a:r>
                     </a:p>
                   </a:txBody>
@@ -3766,7 +3766,7 @@
                         <a:rPr sz="900">
                           <a:latin typeface="Segoe UI"/>
                         </a:rPr>
-                        <a:t>Non-Fleet Subs: 579  |  Binds: 56</a:t>
+                        <a:t>Non-Fleet Subs: 585  |  Binds: 56</a:t>
                       </a:r>
                     </a:p>
                   </a:txBody>
@@ -3803,7 +3803,7 @@
                         <a:rPr sz="900">
                           <a:latin typeface="Segoe UI"/>
                         </a:rPr>
-                        <a:t>Non-Fleet Bound Premium: $2,379,177.82</a:t>
+                        <a:t>Non-Fleet Bound Premium: $1,969,965.04</a:t>
                       </a:r>
                     </a:p>
                   </a:txBody>
@@ -3840,7 +3840,7 @@
                         <a:rPr sz="900">
                           <a:latin typeface="Segoe UI"/>
                         </a:rPr>
-                        <a:t>Non-Fleet Book %: 55.0%</a:t>
+                        <a:t>Non-Fleet Book %: 45.5%</a:t>
                       </a:r>
                     </a:p>
                   </a:txBody>
@@ -4311,7 +4311,7 @@
                         <a:rPr sz="800">
                           <a:latin typeface="Segoe UI"/>
                         </a:rPr>
-                        <a:t>162</a:t>
+                        <a:t>163</a:t>
                       </a:r>
                     </a:p>
                   </a:txBody>
@@ -4428,7 +4428,7 @@
                           </a:solidFill>
                           <a:latin typeface="Segoe UI"/>
                         </a:rPr>
-                        <a:t>104</a:t>
+                        <a:t>113</a:t>
                       </a:r>
                     </a:p>
                   </a:txBody>
@@ -4581,7 +4581,7 @@
                         <a:rPr sz="800">
                           <a:latin typeface="Segoe UI"/>
                         </a:rPr>
-                        <a:t>18.5%</a:t>
+                        <a:t>19.0%</a:t>
                       </a:r>
                     </a:p>
                   </a:txBody>
@@ -4624,7 +4624,7 @@
                           </a:solidFill>
                           <a:latin typeface="Segoe UI"/>
                         </a:rPr>
-                        <a:t>16.7%</a:t>
+                        <a:t>17.3%</a:t>
                       </a:r>
                     </a:p>
                   </a:txBody>
@@ -4664,7 +4664,7 @@
                         <a:rPr sz="800">
                           <a:latin typeface="Segoe UI"/>
                         </a:rPr>
-                        <a:t>27.4%</a:t>
+                        <a:t>28.2%</a:t>
                       </a:r>
                     </a:p>
                   </a:txBody>
@@ -4707,7 +4707,7 @@
                           </a:solidFill>
                           <a:latin typeface="Segoe UI"/>
                         </a:rPr>
-                        <a:t>11.5%</a:t>
+                        <a:t>14.2%</a:t>
                       </a:r>
                     </a:p>
                   </a:txBody>
@@ -4866,7 +4866,7 @@
                         <a:rPr sz="800">
                           <a:latin typeface="Segoe UI"/>
                         </a:rPr>
-                        <a:t>30</a:t>
+                        <a:t>31</a:t>
                       </a:r>
                     </a:p>
                   </a:txBody>
@@ -4906,7 +4906,7 @@
                           </a:solidFill>
                           <a:latin typeface="Segoe UI"/>
                         </a:rPr>
-                        <a:t>28</a:t>
+                        <a:t>29</a:t>
                       </a:r>
                     </a:p>
                   </a:txBody>
@@ -4943,7 +4943,7 @@
                         <a:rPr sz="800">
                           <a:latin typeface="Segoe UI"/>
                         </a:rPr>
-                        <a:t>34</a:t>
+                        <a:t>35</a:t>
                       </a:r>
                     </a:p>
                   </a:txBody>
@@ -4983,7 +4983,7 @@
                           </a:solidFill>
                           <a:latin typeface="Segoe UI"/>
                         </a:rPr>
-                        <a:t>12</a:t>
+                        <a:t>16</a:t>
                       </a:r>
                     </a:p>
                   </a:txBody>

--- a/generated/Tier 1 Broker Scorecards/Safeline Insurance Agency, Inc._Broker_Scorecard.pptx
+++ b/generated/Tier 1 Broker Scorecards/Safeline Insurance Agency, Inc._Broker_Scorecard.pptx
@@ -3357,7 +3357,7 @@
                         <a:rPr sz="800">
                           <a:latin typeface="Segoe UI"/>
                         </a:rPr>
-                        <a:t>$5,475,694.67 / $8,625,181.81 / $4,326,352.11</a:t>
+                        <a:t>$5,475,694.67 / $8,643,538.24 / $4,344,708.54</a:t>
                       </a:r>
                     </a:p>
                   </a:txBody>
@@ -3431,7 +3431,7 @@
                         <a:rPr sz="900">
                           <a:latin typeface="Segoe UI"/>
                         </a:rPr>
-                        <a:t>$7,665,972.54  (56.4% achieved)</a:t>
+                        <a:t>$7,665,972.54  (56.7% achieved)</a:t>
                       </a:r>
                     </a:p>
                   </a:txBody>
@@ -3653,7 +3653,7 @@
                         <a:rPr sz="900">
                           <a:latin typeface="Segoe UI"/>
                         </a:rPr>
-                        <a:t>Fleet Subs: 70  |  Binds: 12</a:t>
+                        <a:t>Fleet Subs: 72  |  Binds: 14</a:t>
                       </a:r>
                     </a:p>
                   </a:txBody>
@@ -3690,7 +3690,7 @@
                         <a:rPr sz="900">
                           <a:latin typeface="Segoe UI"/>
                         </a:rPr>
-                        <a:t>Fleet Bound Premium: $2,356,387.07</a:t>
+                        <a:t>Fleet Bound Premium: $2,571,176.84</a:t>
                       </a:r>
                     </a:p>
                   </a:txBody>
@@ -3727,7 +3727,7 @@
                         <a:rPr sz="900">
                           <a:latin typeface="Segoe UI"/>
                         </a:rPr>
-                        <a:t>Fleet Book %: 54.5%</a:t>
+                        <a:t>Fleet Book %: 59.2%</a:t>
                       </a:r>
                     </a:p>
                   </a:txBody>
@@ -3766,7 +3766,7 @@
                         <a:rPr sz="900">
                           <a:latin typeface="Segoe UI"/>
                         </a:rPr>
-                        <a:t>Non-Fleet Subs: 585  |  Binds: 56</a:t>
+                        <a:t>Non-Fleet Subs: 593  |  Binds: 55</a:t>
                       </a:r>
                     </a:p>
                   </a:txBody>
@@ -3803,7 +3803,7 @@
                         <a:rPr sz="900">
                           <a:latin typeface="Segoe UI"/>
                         </a:rPr>
-                        <a:t>Non-Fleet Bound Premium: $1,969,965.04</a:t>
+                        <a:t>Non-Fleet Bound Premium: $1,773,531.70</a:t>
                       </a:r>
                     </a:p>
                   </a:txBody>
@@ -3840,7 +3840,7 @@
                         <a:rPr sz="900">
                           <a:latin typeface="Segoe UI"/>
                         </a:rPr>
-                        <a:t>Non-Fleet Book %: 45.5%</a:t>
+                        <a:t>Non-Fleet Book %: 40.8%</a:t>
                       </a:r>
                     </a:p>
                   </a:txBody>
@@ -4424,11 +4424,11 @@
                       <a:r>
                         <a:rPr sz="800">
                           <a:solidFill>
-                            <a:srgbClr val="DC2626"/>
+                            <a:srgbClr val="059669"/>
                           </a:solidFill>
                           <a:latin typeface="Segoe UI"/>
                         </a:rPr>
-                        <a:t>113</a:t>
+                        <a:t>125</a:t>
                       </a:r>
                     </a:p>
                   </a:txBody>
@@ -4707,7 +4707,7 @@
                           </a:solidFill>
                           <a:latin typeface="Segoe UI"/>
                         </a:rPr>
-                        <a:t>14.2%</a:t>
+                        <a:t>13.6%</a:t>
                       </a:r>
                     </a:p>
                   </a:txBody>
@@ -4983,7 +4983,7 @@
                           </a:solidFill>
                           <a:latin typeface="Segoe UI"/>
                         </a:rPr>
-                        <a:t>16</a:t>
+                        <a:t>17</a:t>
                       </a:r>
                     </a:p>
                   </a:txBody>
@@ -5262,7 +5262,7 @@
                           </a:solidFill>
                           <a:latin typeface="Segoe UI"/>
                         </a:rPr>
-                        <a:t>$290.7K</a:t>
+                        <a:t>$309.0K</a:t>
                       </a:r>
                     </a:p>
                   </a:txBody>

--- a/generated/Tier 1 Broker Scorecards/Safeline Insurance Agency, Inc._Broker_Scorecard.pptx
+++ b/generated/Tier 1 Broker Scorecards/Safeline Insurance Agency, Inc._Broker_Scorecard.pptx
@@ -3357,7 +3357,7 @@
                         <a:rPr sz="800">
                           <a:latin typeface="Segoe UI"/>
                         </a:rPr>
-                        <a:t>$5,475,694.67 / $8,643,538.24 / $4,344,708.54</a:t>
+                        <a:t>$5,475,694.67 / $8,770,844.05 / $4,472,014.35</a:t>
                       </a:r>
                     </a:p>
                   </a:txBody>
@@ -3394,7 +3394,7 @@
                         <a:rPr sz="900">
                           <a:latin typeface="Segoe UI"/>
                         </a:rPr>
-                        <a:t>Tier 1  |  10.38% / 15.00%</a:t>
+                        <a:t>Tier 1  |  10.78% / 15.00%</a:t>
                       </a:r>
                     </a:p>
                   </a:txBody>
@@ -3431,7 +3431,7 @@
                         <a:rPr sz="900">
                           <a:latin typeface="Segoe UI"/>
                         </a:rPr>
-                        <a:t>$7,665,972.54  (56.7% achieved)</a:t>
+                        <a:t>$7,665,972.54  (58.3% achieved)</a:t>
                       </a:r>
                     </a:p>
                   </a:txBody>
@@ -3653,7 +3653,7 @@
                         <a:rPr sz="900">
                           <a:latin typeface="Segoe UI"/>
                         </a:rPr>
-                        <a:t>Fleet Subs: 72  |  Binds: 14</a:t>
+                        <a:t>Fleet Subs: 73  |  Binds: 17</a:t>
                       </a:r>
                     </a:p>
                   </a:txBody>
@@ -3690,7 +3690,7 @@
                         <a:rPr sz="900">
                           <a:latin typeface="Segoe UI"/>
                         </a:rPr>
-                        <a:t>Fleet Bound Premium: $2,571,176.84</a:t>
+                        <a:t>Fleet Bound Premium: $2,782,159.41</a:t>
                       </a:r>
                     </a:p>
                   </a:txBody>
@@ -3727,7 +3727,7 @@
                         <a:rPr sz="900">
                           <a:latin typeface="Segoe UI"/>
                         </a:rPr>
-                        <a:t>Fleet Book %: 59.2%</a:t>
+                        <a:t>Fleet Book %: 62.2%</a:t>
                       </a:r>
                     </a:p>
                   </a:txBody>
@@ -3766,7 +3766,7 @@
                         <a:rPr sz="900">
                           <a:latin typeface="Segoe UI"/>
                         </a:rPr>
-                        <a:t>Non-Fleet Subs: 593  |  Binds: 55</a:t>
+                        <a:t>Non-Fleet Subs: 595  |  Binds: 55</a:t>
                       </a:r>
                     </a:p>
                   </a:txBody>
@@ -3803,7 +3803,7 @@
                         <a:rPr sz="900">
                           <a:latin typeface="Segoe UI"/>
                         </a:rPr>
-                        <a:t>Non-Fleet Bound Premium: $1,773,531.70</a:t>
+                        <a:t>Non-Fleet Bound Premium: $1,689,854.94</a:t>
                       </a:r>
                     </a:p>
                   </a:txBody>
@@ -3840,7 +3840,7 @@
                         <a:rPr sz="900">
                           <a:latin typeface="Segoe UI"/>
                         </a:rPr>
-                        <a:t>Non-Fleet Book %: 40.8%</a:t>
+                        <a:t>Non-Fleet Book %: 37.8%</a:t>
                       </a:r>
                     </a:p>
                   </a:txBody>
@@ -4428,7 +4428,7 @@
                           </a:solidFill>
                           <a:latin typeface="Segoe UI"/>
                         </a:rPr>
-                        <a:t>125</a:t>
+                        <a:t>128</a:t>
                       </a:r>
                     </a:p>
                   </a:txBody>
@@ -4707,7 +4707,7 @@
                           </a:solidFill>
                           <a:latin typeface="Segoe UI"/>
                         </a:rPr>
-                        <a:t>13.6%</a:t>
+                        <a:t>14.8%</a:t>
                       </a:r>
                     </a:p>
                   </a:txBody>
@@ -4983,7 +4983,7 @@
                           </a:solidFill>
                           <a:latin typeface="Segoe UI"/>
                         </a:rPr>
-                        <a:t>17</a:t>
+                        <a:t>19</a:t>
                       </a:r>
                     </a:p>
                   </a:txBody>
@@ -5262,7 +5262,7 @@
                           </a:solidFill>
                           <a:latin typeface="Segoe UI"/>
                         </a:rPr>
-                        <a:t>$309.0K</a:t>
+                        <a:t>$436.3K</a:t>
                       </a:r>
                     </a:p>
                   </a:txBody>

--- a/generated/Tier 1 Broker Scorecards/Safeline Insurance Agency, Inc._Broker_Scorecard.pptx
+++ b/generated/Tier 1 Broker Scorecards/Safeline Insurance Agency, Inc._Broker_Scorecard.pptx
@@ -3357,7 +3357,7 @@
                         <a:rPr sz="800">
                           <a:latin typeface="Segoe UI"/>
                         </a:rPr>
-                        <a:t>$5,475,694.67 / $8,770,844.05 / $4,472,014.35</a:t>
+                        <a:t>$5,475,694.67 / $8,811,166.37 / $4,512,336.67</a:t>
                       </a:r>
                     </a:p>
                   </a:txBody>
@@ -3394,7 +3394,7 @@
                         <a:rPr sz="900">
                           <a:latin typeface="Segoe UI"/>
                         </a:rPr>
-                        <a:t>Tier 1  |  10.78% / 15.00%</a:t>
+                        <a:t>Tier 1  |  10.46% / 15.00%</a:t>
                       </a:r>
                     </a:p>
                   </a:txBody>
@@ -3431,7 +3431,7 @@
                         <a:rPr sz="900">
                           <a:latin typeface="Segoe UI"/>
                         </a:rPr>
-                        <a:t>$7,665,972.54  (58.3% achieved)</a:t>
+                        <a:t>$7,665,972.54  (58.9% achieved)</a:t>
                       </a:r>
                     </a:p>
                   </a:txBody>
@@ -3653,7 +3653,7 @@
                         <a:rPr sz="900">
                           <a:latin typeface="Segoe UI"/>
                         </a:rPr>
-                        <a:t>Fleet Subs: 73  |  Binds: 17</a:t>
+                        <a:t>Fleet Subs: 74  |  Binds: 15</a:t>
                       </a:r>
                     </a:p>
                   </a:txBody>
@@ -3690,7 +3690,7 @@
                         <a:rPr sz="900">
                           <a:latin typeface="Segoe UI"/>
                         </a:rPr>
-                        <a:t>Fleet Bound Premium: $2,782,159.41</a:t>
+                        <a:t>Fleet Bound Premium: $2,546,216.66</a:t>
                       </a:r>
                     </a:p>
                   </a:txBody>
@@ -3727,7 +3727,7 @@
                         <a:rPr sz="900">
                           <a:latin typeface="Segoe UI"/>
                         </a:rPr>
-                        <a:t>Fleet Book %: 62.2%</a:t>
+                        <a:t>Fleet Book %: 56.4%</a:t>
                       </a:r>
                     </a:p>
                   </a:txBody>
@@ -3803,7 +3803,7 @@
                         <a:rPr sz="900">
                           <a:latin typeface="Segoe UI"/>
                         </a:rPr>
-                        <a:t>Non-Fleet Bound Premium: $1,689,854.94</a:t>
+                        <a:t>Non-Fleet Bound Premium: $1,966,120.01</a:t>
                       </a:r>
                     </a:p>
                   </a:txBody>
@@ -3840,7 +3840,7 @@
                         <a:rPr sz="900">
                           <a:latin typeface="Segoe UI"/>
                         </a:rPr>
-                        <a:t>Non-Fleet Book %: 37.8%</a:t>
+                        <a:t>Non-Fleet Book %: 43.6%</a:t>
                       </a:r>
                     </a:p>
                   </a:txBody>
@@ -4311,7 +4311,7 @@
                         <a:rPr sz="800">
                           <a:latin typeface="Segoe UI"/>
                         </a:rPr>
-                        <a:t>163</a:t>
+                        <a:t>162</a:t>
                       </a:r>
                     </a:p>
                   </a:txBody>
@@ -4428,7 +4428,7 @@
                           </a:solidFill>
                           <a:latin typeface="Segoe UI"/>
                         </a:rPr>
-                        <a:t>128</a:t>
+                        <a:t>131</a:t>
                       </a:r>
                     </a:p>
                   </a:txBody>
@@ -4581,7 +4581,7 @@
                         <a:rPr sz="800">
                           <a:latin typeface="Segoe UI"/>
                         </a:rPr>
-                        <a:t>19.0%</a:t>
+                        <a:t>17.9%</a:t>
                       </a:r>
                     </a:p>
                   </a:txBody>
@@ -4664,7 +4664,7 @@
                         <a:rPr sz="800">
                           <a:latin typeface="Segoe UI"/>
                         </a:rPr>
-                        <a:t>28.2%</a:t>
+                        <a:t>27.4%</a:t>
                       </a:r>
                     </a:p>
                   </a:txBody>
@@ -4707,7 +4707,7 @@
                           </a:solidFill>
                           <a:latin typeface="Segoe UI"/>
                         </a:rPr>
-                        <a:t>14.8%</a:t>
+                        <a:t>15.3%</a:t>
                       </a:r>
                     </a:p>
                   </a:txBody>
@@ -4866,7 +4866,81 @@
                         <a:rPr sz="800">
                           <a:latin typeface="Segoe UI"/>
                         </a:rPr>
-                        <a:t>31</a:t>
+                        <a:t>29</a:t>
+                      </a:r>
+                    </a:p>
+                  </a:txBody>
+                  <a:tcPr marL="114300" marR="91425" marT="45700" marB="45700">
+                    <a:lnL w="6350" cap="flat" cmpd="sng">
+                      <a:solidFill>
+                        <a:srgbClr val="E5E7EB"/>
+                      </a:solidFill>
+                    </a:lnL>
+                    <a:lnR w="6350" cap="flat" cmpd="sng">
+                      <a:solidFill>
+                        <a:srgbClr val="E5E7EB"/>
+                      </a:solidFill>
+                    </a:lnR>
+                    <a:lnT w="6350" cap="flat" cmpd="sng">
+                      <a:solidFill>
+                        <a:srgbClr val="E5E7EB"/>
+                      </a:solidFill>
+                    </a:lnT>
+                    <a:lnB w="6350" cap="flat" cmpd="sng">
+                      <a:solidFill>
+                        <a:srgbClr val="E5E7EB"/>
+                      </a:solidFill>
+                    </a:lnB>
+                  </a:tcPr>
+                </a:tc>
+                <a:tc>
+                  <a:txBody>
+                    <a:bodyPr/>
+                    <a:lstStyle/>
+                    <a:p>
+                      <a:pPr algn="ctr"/>
+                      <a:r>
+                        <a:rPr sz="800">
+                          <a:latin typeface="Segoe UI"/>
+                        </a:rPr>
+                        <a:t>29</a:t>
+                      </a:r>
+                    </a:p>
+                  </a:txBody>
+                  <a:tcPr marL="114300" marR="91425" marT="45700" marB="45700">
+                    <a:lnL w="6350" cap="flat" cmpd="sng">
+                      <a:solidFill>
+                        <a:srgbClr val="E5E7EB"/>
+                      </a:solidFill>
+                    </a:lnL>
+                    <a:lnR w="6350" cap="flat" cmpd="sng">
+                      <a:solidFill>
+                        <a:srgbClr val="E5E7EB"/>
+                      </a:solidFill>
+                    </a:lnR>
+                    <a:lnT w="6350" cap="flat" cmpd="sng">
+                      <a:solidFill>
+                        <a:srgbClr val="E5E7EB"/>
+                      </a:solidFill>
+                    </a:lnT>
+                    <a:lnB w="6350" cap="flat" cmpd="sng">
+                      <a:solidFill>
+                        <a:srgbClr val="E5E7EB"/>
+                      </a:solidFill>
+                    </a:lnB>
+                  </a:tcPr>
+                </a:tc>
+                <a:tc>
+                  <a:txBody>
+                    <a:bodyPr/>
+                    <a:lstStyle/>
+                    <a:p>
+                      <a:pPr algn="ctr"/>
+                      <a:r>
+                        <a:rPr sz="800">
+                          <a:latin typeface="Segoe UI"/>
+                        </a:rPr>
+                        <a:t>34</a:t>
                       </a:r>
                     </a:p>
                   </a:txBody>
@@ -4906,84 +4980,7 @@
                           </a:solidFill>
                           <a:latin typeface="Segoe UI"/>
                         </a:rPr>
-                        <a:t>29</a:t>
-                      </a:r>
-                    </a:p>
-                  </a:txBody>
-                  <a:tcPr marL="114300" marR="91425" marT="45700" marB="45700">
-                    <a:lnL w="6350" cap="flat" cmpd="sng">
-                      <a:solidFill>
-                        <a:srgbClr val="E5E7EB"/>
-                      </a:solidFill>
-                    </a:lnL>
-                    <a:lnR w="6350" cap="flat" cmpd="sng">
-                      <a:solidFill>
-                        <a:srgbClr val="E5E7EB"/>
-                      </a:solidFill>
-                    </a:lnR>
-                    <a:lnT w="6350" cap="flat" cmpd="sng">
-                      <a:solidFill>
-                        <a:srgbClr val="E5E7EB"/>
-                      </a:solidFill>
-                    </a:lnT>
-                    <a:lnB w="6350" cap="flat" cmpd="sng">
-                      <a:solidFill>
-                        <a:srgbClr val="E5E7EB"/>
-                      </a:solidFill>
-                    </a:lnB>
-                  </a:tcPr>
-                </a:tc>
-                <a:tc>
-                  <a:txBody>
-                    <a:bodyPr/>
-                    <a:lstStyle/>
-                    <a:p>
-                      <a:pPr algn="ctr"/>
-                      <a:r>
-                        <a:rPr sz="800">
-                          <a:latin typeface="Segoe UI"/>
-                        </a:rPr>
-                        <a:t>35</a:t>
-                      </a:r>
-                    </a:p>
-                  </a:txBody>
-                  <a:tcPr marL="114300" marR="91425" marT="45700" marB="45700">
-                    <a:lnL w="6350" cap="flat" cmpd="sng">
-                      <a:solidFill>
-                        <a:srgbClr val="E5E7EB"/>
-                      </a:solidFill>
-                    </a:lnL>
-                    <a:lnR w="6350" cap="flat" cmpd="sng">
-                      <a:solidFill>
-                        <a:srgbClr val="E5E7EB"/>
-                      </a:solidFill>
-                    </a:lnR>
-                    <a:lnT w="6350" cap="flat" cmpd="sng">
-                      <a:solidFill>
-                        <a:srgbClr val="E5E7EB"/>
-                      </a:solidFill>
-                    </a:lnT>
-                    <a:lnB w="6350" cap="flat" cmpd="sng">
-                      <a:solidFill>
-                        <a:srgbClr val="E5E7EB"/>
-                      </a:solidFill>
-                    </a:lnB>
-                  </a:tcPr>
-                </a:tc>
-                <a:tc>
-                  <a:txBody>
-                    <a:bodyPr/>
-                    <a:lstStyle/>
-                    <a:p>
-                      <a:pPr algn="ctr"/>
-                      <a:r>
-                        <a:rPr sz="800">
-                          <a:solidFill>
-                            <a:srgbClr val="DC2626"/>
-                          </a:solidFill>
-                          <a:latin typeface="Segoe UI"/>
-                        </a:rPr>
-                        <a:t>19</a:t>
+                        <a:t>20</a:t>
                       </a:r>
                     </a:p>
                   </a:txBody>
@@ -5258,11 +5255,11 @@
                       <a:r>
                         <a:rPr sz="800" b="1">
                           <a:solidFill>
-                            <a:srgbClr val="DC2626"/>
+                            <a:srgbClr val="059669"/>
                           </a:solidFill>
                           <a:latin typeface="Segoe UI"/>
                         </a:rPr>
-                        <a:t>$436.3K</a:t>
+                        <a:t>$476.6K</a:t>
                       </a:r>
                     </a:p>
                   </a:txBody>

--- a/generated/Tier 1 Broker Scorecards/Safeline Insurance Agency, Inc._Broker_Scorecard.pptx
+++ b/generated/Tier 1 Broker Scorecards/Safeline Insurance Agency, Inc._Broker_Scorecard.pptx
@@ -4581,7 +4581,7 @@
                         <a:rPr sz="800">
                           <a:latin typeface="Segoe UI"/>
                         </a:rPr>
-                        <a:t>17.9%</a:t>
+                        <a:t>18.5%</a:t>
                       </a:r>
                     </a:p>
                   </a:txBody>
@@ -4866,7 +4866,7 @@
                         <a:rPr sz="800">
                           <a:latin typeface="Segoe UI"/>
                         </a:rPr>
-                        <a:t>29</a:t>
+                        <a:t>30</a:t>
                       </a:r>
                     </a:p>
                   </a:txBody>
@@ -4901,6 +4901,9 @@
                       <a:pPr algn="ctr"/>
                       <a:r>
                         <a:rPr sz="800">
+                          <a:solidFill>
+                            <a:srgbClr val="DC2626"/>
+                          </a:solidFill>
                           <a:latin typeface="Segoe UI"/>
                         </a:rPr>
                         <a:t>29</a:t>

--- a/generated/Tier 1 Broker Scorecards/Safeline Insurance Agency, Inc._Broker_Scorecard.pptx
+++ b/generated/Tier 1 Broker Scorecards/Safeline Insurance Agency, Inc._Broker_Scorecard.pptx
@@ -3394,7 +3394,7 @@
                         <a:rPr sz="900">
                           <a:latin typeface="Segoe UI"/>
                         </a:rPr>
-                        <a:t>Tier 1  |  10.46% / 15.00%</a:t>
+                        <a:t>Tier 1  |  10.61% / 15.00%</a:t>
                       </a:r>
                     </a:p>
                   </a:txBody>
@@ -3690,7 +3690,7 @@
                         <a:rPr sz="900">
                           <a:latin typeface="Segoe UI"/>
                         </a:rPr>
-                        <a:t>Fleet Bound Premium: $2,546,216.66</a:t>
+                        <a:t>Fleet Bound Premium: $2,541,913.26</a:t>
                       </a:r>
                     </a:p>
                   </a:txBody>
@@ -3727,7 +3727,7 @@
                         <a:rPr sz="900">
                           <a:latin typeface="Segoe UI"/>
                         </a:rPr>
-                        <a:t>Fleet Book %: 56.4%</a:t>
+                        <a:t>Fleet Book %: 56.3%</a:t>
                       </a:r>
                     </a:p>
                   </a:txBody>
@@ -3766,7 +3766,7 @@
                         <a:rPr sz="900">
                           <a:latin typeface="Segoe UI"/>
                         </a:rPr>
-                        <a:t>Non-Fleet Subs: 595  |  Binds: 55</a:t>
+                        <a:t>Non-Fleet Subs: 595  |  Binds: 56</a:t>
                       </a:r>
                     </a:p>
                   </a:txBody>
@@ -3803,7 +3803,7 @@
                         <a:rPr sz="900">
                           <a:latin typeface="Segoe UI"/>
                         </a:rPr>
-                        <a:t>Non-Fleet Bound Premium: $1,966,120.01</a:t>
+                        <a:t>Non-Fleet Bound Premium: $1,970,423.41</a:t>
                       </a:r>
                     </a:p>
                   </a:txBody>
@@ -3840,7 +3840,7 @@
                         <a:rPr sz="900">
                           <a:latin typeface="Segoe UI"/>
                         </a:rPr>
-                        <a:t>Non-Fleet Book %: 43.6%</a:t>
+                        <a:t>Non-Fleet Book %: 43.7%</a:t>
                       </a:r>
                     </a:p>
                   </a:txBody>
@@ -4311,7 +4311,7 @@
                         <a:rPr sz="800">
                           <a:latin typeface="Segoe UI"/>
                         </a:rPr>
-                        <a:t>162</a:t>
+                        <a:t>163</a:t>
                       </a:r>
                     </a:p>
                   </a:txBody>
@@ -4581,7 +4581,7 @@
                         <a:rPr sz="800">
                           <a:latin typeface="Segoe UI"/>
                         </a:rPr>
-                        <a:t>18.5%</a:t>
+                        <a:t>19.0%</a:t>
                       </a:r>
                     </a:p>
                   </a:txBody>
@@ -4624,7 +4624,7 @@
                           </a:solidFill>
                           <a:latin typeface="Segoe UI"/>
                         </a:rPr>
-                        <a:t>17.3%</a:t>
+                        <a:t>17.9%</a:t>
                       </a:r>
                     </a:p>
                   </a:txBody>
@@ -4664,7 +4664,7 @@
                         <a:rPr sz="800">
                           <a:latin typeface="Segoe UI"/>
                         </a:rPr>
-                        <a:t>27.4%</a:t>
+                        <a:t>28.2%</a:t>
                       </a:r>
                     </a:p>
                   </a:txBody>
@@ -4866,7 +4866,7 @@
                         <a:rPr sz="800">
                           <a:latin typeface="Segoe UI"/>
                         </a:rPr>
-                        <a:t>30</a:t>
+                        <a:t>31</a:t>
                       </a:r>
                     </a:p>
                   </a:txBody>
@@ -4906,7 +4906,7 @@
                           </a:solidFill>
                           <a:latin typeface="Segoe UI"/>
                         </a:rPr>
-                        <a:t>29</a:t>
+                        <a:t>30</a:t>
                       </a:r>
                     </a:p>
                   </a:txBody>
@@ -4943,7 +4943,7 @@
                         <a:rPr sz="800">
                           <a:latin typeface="Segoe UI"/>
                         </a:rPr>
-                        <a:t>34</a:t>
+                        <a:t>35</a:t>
                       </a:r>
                     </a:p>
                   </a:txBody>

--- a/generated/Tier 1 Broker Scorecards/Safeline Insurance Agency, Inc._Broker_Scorecard.pptx
+++ b/generated/Tier 1 Broker Scorecards/Safeline Insurance Agency, Inc._Broker_Scorecard.pptx
@@ -3394,7 +3394,7 @@
                         <a:rPr sz="900">
                           <a:latin typeface="Segoe UI"/>
                         </a:rPr>
-                        <a:t>Tier 1  |  10.61% / 15.00%</a:t>
+                        <a:t>Tier 1  |  10.46% / 15.00%</a:t>
                       </a:r>
                     </a:p>
                   </a:txBody>
@@ -3690,7 +3690,7 @@
                         <a:rPr sz="900">
                           <a:latin typeface="Segoe UI"/>
                         </a:rPr>
-                        <a:t>Fleet Bound Premium: $2,541,913.26</a:t>
+                        <a:t>Fleet Bound Premium: $2,546,216.66</a:t>
                       </a:r>
                     </a:p>
                   </a:txBody>
@@ -3727,7 +3727,7 @@
                         <a:rPr sz="900">
                           <a:latin typeface="Segoe UI"/>
                         </a:rPr>
-                        <a:t>Fleet Book %: 56.3%</a:t>
+                        <a:t>Fleet Book %: 56.4%</a:t>
                       </a:r>
                     </a:p>
                   </a:txBody>
@@ -3766,7 +3766,7 @@
                         <a:rPr sz="900">
                           <a:latin typeface="Segoe UI"/>
                         </a:rPr>
-                        <a:t>Non-Fleet Subs: 595  |  Binds: 56</a:t>
+                        <a:t>Non-Fleet Subs: 595  |  Binds: 55</a:t>
                       </a:r>
                     </a:p>
                   </a:txBody>
@@ -3803,7 +3803,7 @@
                         <a:rPr sz="900">
                           <a:latin typeface="Segoe UI"/>
                         </a:rPr>
-                        <a:t>Non-Fleet Bound Premium: $1,970,423.41</a:t>
+                        <a:t>Non-Fleet Bound Premium: $1,966,120.01</a:t>
                       </a:r>
                     </a:p>
                   </a:txBody>
@@ -3840,7 +3840,7 @@
                         <a:rPr sz="900">
                           <a:latin typeface="Segoe UI"/>
                         </a:rPr>
-                        <a:t>Non-Fleet Book %: 43.7%</a:t>
+                        <a:t>Non-Fleet Book %: 43.6%</a:t>
                       </a:r>
                     </a:p>
                   </a:txBody>
@@ -4311,7 +4311,7 @@
                         <a:rPr sz="800">
                           <a:latin typeface="Segoe UI"/>
                         </a:rPr>
-                        <a:t>163</a:t>
+                        <a:t>162</a:t>
                       </a:r>
                     </a:p>
                   </a:txBody>
@@ -4581,7 +4581,7 @@
                         <a:rPr sz="800">
                           <a:latin typeface="Segoe UI"/>
                         </a:rPr>
-                        <a:t>19.0%</a:t>
+                        <a:t>18.5%</a:t>
                       </a:r>
                     </a:p>
                   </a:txBody>
@@ -4624,7 +4624,7 @@
                           </a:solidFill>
                           <a:latin typeface="Segoe UI"/>
                         </a:rPr>
-                        <a:t>17.9%</a:t>
+                        <a:t>17.3%</a:t>
                       </a:r>
                     </a:p>
                   </a:txBody>
@@ -4664,7 +4664,7 @@
                         <a:rPr sz="800">
                           <a:latin typeface="Segoe UI"/>
                         </a:rPr>
-                        <a:t>28.2%</a:t>
+                        <a:t>27.4%</a:t>
                       </a:r>
                     </a:p>
                   </a:txBody>
@@ -4866,7 +4866,7 @@
                         <a:rPr sz="800">
                           <a:latin typeface="Segoe UI"/>
                         </a:rPr>
-                        <a:t>31</a:t>
+                        <a:t>30</a:t>
                       </a:r>
                     </a:p>
                   </a:txBody>
@@ -4906,7 +4906,7 @@
                           </a:solidFill>
                           <a:latin typeface="Segoe UI"/>
                         </a:rPr>
-                        <a:t>30</a:t>
+                        <a:t>29</a:t>
                       </a:r>
                     </a:p>
                   </a:txBody>
@@ -4943,7 +4943,7 @@
                         <a:rPr sz="800">
                           <a:latin typeface="Segoe UI"/>
                         </a:rPr>
-                        <a:t>35</a:t>
+                        <a:t>34</a:t>
                       </a:r>
                     </a:p>
                   </a:txBody>

--- a/generated/Tier 1 Broker Scorecards/Safeline Insurance Agency, Inc._Broker_Scorecard.pptx
+++ b/generated/Tier 1 Broker Scorecards/Safeline Insurance Agency, Inc._Broker_Scorecard.pptx
@@ -3357,7 +3357,7 @@
                         <a:rPr sz="800">
                           <a:latin typeface="Segoe UI"/>
                         </a:rPr>
-                        <a:t>$5,475,694.67 / $8,811,166.37 / $4,512,336.67</a:t>
+                        <a:t>$5,475,694.67 / $8,802,772.23 / $4,503,942.53</a:t>
                       </a:r>
                     </a:p>
                   </a:txBody>
@@ -3394,7 +3394,7 @@
                         <a:rPr sz="900">
                           <a:latin typeface="Segoe UI"/>
                         </a:rPr>
-                        <a:t>Tier 1  |  10.46% / 15.00%</a:t>
+                        <a:t>Tier 1  |  10.53% / 15.00%</a:t>
                       </a:r>
                     </a:p>
                   </a:txBody>
@@ -3431,7 +3431,7 @@
                         <a:rPr sz="900">
                           <a:latin typeface="Segoe UI"/>
                         </a:rPr>
-                        <a:t>$7,665,972.54  (58.9% achieved)</a:t>
+                        <a:t>$7,665,972.54  (58.8% achieved)</a:t>
                       </a:r>
                     </a:p>
                   </a:txBody>
@@ -3653,7 +3653,7 @@
                         <a:rPr sz="900">
                           <a:latin typeface="Segoe UI"/>
                         </a:rPr>
-                        <a:t>Fleet Subs: 74  |  Binds: 15</a:t>
+                        <a:t>Fleet Subs: 75  |  Binds: 15</a:t>
                       </a:r>
                     </a:p>
                   </a:txBody>
@@ -3690,7 +3690,7 @@
                         <a:rPr sz="900">
                           <a:latin typeface="Segoe UI"/>
                         </a:rPr>
-                        <a:t>Fleet Bound Premium: $2,546,216.66</a:t>
+                        <a:t>Fleet Bound Premium: $2,553,357.33</a:t>
                       </a:r>
                     </a:p>
                   </a:txBody>
@@ -3727,7 +3727,7 @@
                         <a:rPr sz="900">
                           <a:latin typeface="Segoe UI"/>
                         </a:rPr>
-                        <a:t>Fleet Book %: 56.4%</a:t>
+                        <a:t>Fleet Book %: 56.7%</a:t>
                       </a:r>
                     </a:p>
                   </a:txBody>
@@ -3766,7 +3766,7 @@
                         <a:rPr sz="900">
                           <a:latin typeface="Segoe UI"/>
                         </a:rPr>
-                        <a:t>Non-Fleet Subs: 595  |  Binds: 55</a:t>
+                        <a:t>Non-Fleet Subs: 599  |  Binds: 56</a:t>
                       </a:r>
                     </a:p>
                   </a:txBody>
@@ -3803,7 +3803,7 @@
                         <a:rPr sz="900">
                           <a:latin typeface="Segoe UI"/>
                         </a:rPr>
-                        <a:t>Non-Fleet Bound Premium: $1,966,120.01</a:t>
+                        <a:t>Non-Fleet Bound Premium: $1,950,585.20</a:t>
                       </a:r>
                     </a:p>
                   </a:txBody>
@@ -3840,7 +3840,7 @@
                         <a:rPr sz="900">
                           <a:latin typeface="Segoe UI"/>
                         </a:rPr>
-                        <a:t>Non-Fleet Book %: 43.6%</a:t>
+                        <a:t>Non-Fleet Book %: 43.3%</a:t>
                       </a:r>
                     </a:p>
                   </a:txBody>
@@ -4428,7 +4428,7 @@
                           </a:solidFill>
                           <a:latin typeface="Segoe UI"/>
                         </a:rPr>
-                        <a:t>131</a:t>
+                        <a:t>137</a:t>
                       </a:r>
                     </a:p>
                   </a:txBody>
@@ -4707,7 +4707,7 @@
                           </a:solidFill>
                           <a:latin typeface="Segoe UI"/>
                         </a:rPr>
-                        <a:t>15.3%</a:t>
+                        <a:t>16.1%</a:t>
                       </a:r>
                     </a:p>
                   </a:txBody>
@@ -4983,7 +4983,7 @@
                           </a:solidFill>
                           <a:latin typeface="Segoe UI"/>
                         </a:rPr>
-                        <a:t>20</a:t>
+                        <a:t>22</a:t>
                       </a:r>
                     </a:p>
                   </a:txBody>
@@ -5262,7 +5262,7 @@
                           </a:solidFill>
                           <a:latin typeface="Segoe UI"/>
                         </a:rPr>
-                        <a:t>$476.6K</a:t>
+                        <a:t>$468.3K</a:t>
                       </a:r>
                     </a:p>
                   </a:txBody>

--- a/generated/Tier 1 Broker Scorecards/Safeline Insurance Agency, Inc._Broker_Scorecard.pptx
+++ b/generated/Tier 1 Broker Scorecards/Safeline Insurance Agency, Inc._Broker_Scorecard.pptx
@@ -3394,7 +3394,7 @@
                         <a:rPr sz="900">
                           <a:latin typeface="Segoe UI"/>
                         </a:rPr>
-                        <a:t>Tier 1  |  10.53% / 15.00%</a:t>
+                        <a:t>Tier 1  |  10.29% / 15.00%</a:t>
                       </a:r>
                     </a:p>
                   </a:txBody>
@@ -3653,7 +3653,7 @@
                         <a:rPr sz="900">
                           <a:latin typeface="Segoe UI"/>
                         </a:rPr>
-                        <a:t>Fleet Subs: 75  |  Binds: 15</a:t>
+                        <a:t>Fleet Subs: 74  |  Binds: 14</a:t>
                       </a:r>
                     </a:p>
                   </a:txBody>
@@ -3690,7 +3690,7 @@
                         <a:rPr sz="900">
                           <a:latin typeface="Segoe UI"/>
                         </a:rPr>
-                        <a:t>Fleet Bound Premium: $2,553,357.33</a:t>
+                        <a:t>Fleet Bound Premium: $2,639,269.70</a:t>
                       </a:r>
                     </a:p>
                   </a:txBody>
@@ -3727,7 +3727,7 @@
                         <a:rPr sz="900">
                           <a:latin typeface="Segoe UI"/>
                         </a:rPr>
-                        <a:t>Fleet Book %: 56.7%</a:t>
+                        <a:t>Fleet Book %: 58.6%</a:t>
                       </a:r>
                     </a:p>
                   </a:txBody>
@@ -3766,7 +3766,7 @@
                         <a:rPr sz="900">
                           <a:latin typeface="Segoe UI"/>
                         </a:rPr>
-                        <a:t>Non-Fleet Subs: 599  |  Binds: 56</a:t>
+                        <a:t>Non-Fleet Subs: 606  |  Binds: 56</a:t>
                       </a:r>
                     </a:p>
                   </a:txBody>
@@ -3803,7 +3803,7 @@
                         <a:rPr sz="900">
                           <a:latin typeface="Segoe UI"/>
                         </a:rPr>
-                        <a:t>Non-Fleet Bound Premium: $1,950,585.20</a:t>
+                        <a:t>Non-Fleet Bound Premium: $1,864,672.83</a:t>
                       </a:r>
                     </a:p>
                   </a:txBody>
@@ -3840,7 +3840,7 @@
                         <a:rPr sz="900">
                           <a:latin typeface="Segoe UI"/>
                         </a:rPr>
-                        <a:t>Non-Fleet Book %: 43.3%</a:t>
+                        <a:t>Non-Fleet Book %: 41.4%</a:t>
                       </a:r>
                     </a:p>
                   </a:txBody>
@@ -4311,7 +4311,7 @@
                         <a:rPr sz="800">
                           <a:latin typeface="Segoe UI"/>
                         </a:rPr>
-                        <a:t>162</a:t>
+                        <a:t>163</a:t>
                       </a:r>
                     </a:p>
                   </a:txBody>
@@ -4428,7 +4428,7 @@
                           </a:solidFill>
                           <a:latin typeface="Segoe UI"/>
                         </a:rPr>
-                        <a:t>137</a:t>
+                        <a:t>143</a:t>
                       </a:r>
                     </a:p>
                   </a:txBody>
@@ -4581,7 +4581,90 @@
                         <a:rPr sz="800">
                           <a:latin typeface="Segoe UI"/>
                         </a:rPr>
+                        <a:t>18.4%</a:t>
+                      </a:r>
+                    </a:p>
+                  </a:txBody>
+                  <a:tcPr marL="114300" marR="91425" marT="45700" marB="45700">
+                    <a:solidFill>
+                      <a:srgbClr val="F5F3FF"/>
+                    </a:solidFill>
+                    <a:lnL w="6350" cap="flat" cmpd="sng">
+                      <a:solidFill>
+                        <a:srgbClr val="E5E7EB"/>
+                      </a:solidFill>
+                    </a:lnL>
+                    <a:lnR w="6350" cap="flat" cmpd="sng">
+                      <a:solidFill>
+                        <a:srgbClr val="E5E7EB"/>
+                      </a:solidFill>
+                    </a:lnR>
+                    <a:lnT w="6350" cap="flat" cmpd="sng">
+                      <a:solidFill>
+                        <a:srgbClr val="E5E7EB"/>
+                      </a:solidFill>
+                    </a:lnT>
+                    <a:lnB w="6350" cap="flat" cmpd="sng">
+                      <a:solidFill>
+                        <a:srgbClr val="E5E7EB"/>
+                      </a:solidFill>
+                    </a:lnB>
+                  </a:tcPr>
+                </a:tc>
+                <a:tc>
+                  <a:txBody>
+                    <a:bodyPr/>
+                    <a:lstStyle/>
+                    <a:p>
+                      <a:pPr algn="ctr"/>
+                      <a:r>
+                        <a:rPr sz="800">
+                          <a:solidFill>
+                            <a:srgbClr val="059669"/>
+                          </a:solidFill>
+                          <a:latin typeface="Segoe UI"/>
+                        </a:rPr>
                         <a:t>18.5%</a:t>
+                      </a:r>
+                    </a:p>
+                  </a:txBody>
+                  <a:tcPr marL="114300" marR="91425" marT="45700" marB="45700">
+                    <a:solidFill>
+                      <a:srgbClr val="F5F3FF"/>
+                    </a:solidFill>
+                    <a:lnL w="6350" cap="flat" cmpd="sng">
+                      <a:solidFill>
+                        <a:srgbClr val="E5E7EB"/>
+                      </a:solidFill>
+                    </a:lnL>
+                    <a:lnR w="6350" cap="flat" cmpd="sng">
+                      <a:solidFill>
+                        <a:srgbClr val="E5E7EB"/>
+                      </a:solidFill>
+                    </a:lnR>
+                    <a:lnT w="6350" cap="flat" cmpd="sng">
+                      <a:solidFill>
+                        <a:srgbClr val="E5E7EB"/>
+                      </a:solidFill>
+                    </a:lnT>
+                    <a:lnB w="6350" cap="flat" cmpd="sng">
+                      <a:solidFill>
+                        <a:srgbClr val="E5E7EB"/>
+                      </a:solidFill>
+                    </a:lnB>
+                  </a:tcPr>
+                </a:tc>
+                <a:tc>
+                  <a:txBody>
+                    <a:bodyPr/>
+                    <a:lstStyle/>
+                    <a:p>
+                      <a:pPr algn="ctr"/>
+                      <a:r>
+                        <a:rPr sz="800">
+                          <a:latin typeface="Segoe UI"/>
+                        </a:rPr>
+                        <a:t>28.2%</a:t>
                       </a:r>
                     </a:p>
                   </a:txBody>
@@ -4624,7 +4707,7 @@
                           </a:solidFill>
                           <a:latin typeface="Segoe UI"/>
                         </a:rPr>
-                        <a:t>17.3%</a:t>
+                        <a:t>14.0%</a:t>
                       </a:r>
                     </a:p>
                   </a:txBody>
@@ -4664,7 +4747,7 @@
                         <a:rPr sz="800">
                           <a:latin typeface="Segoe UI"/>
                         </a:rPr>
-                        <a:t>27.4%</a:t>
+                        <a:t>27.7%</a:t>
                       </a:r>
                     </a:p>
                   </a:txBody>
@@ -4672,6 +4755,199 @@
                     <a:solidFill>
                       <a:srgbClr val="F5F3FF"/>
                     </a:solidFill>
+                    <a:lnL w="6350" cap="flat" cmpd="sng">
+                      <a:solidFill>
+                        <a:srgbClr val="E5E7EB"/>
+                      </a:solidFill>
+                    </a:lnL>
+                    <a:lnR w="6350" cap="flat" cmpd="sng">
+                      <a:solidFill>
+                        <a:srgbClr val="E5E7EB"/>
+                      </a:solidFill>
+                    </a:lnR>
+                    <a:lnT w="6350" cap="flat" cmpd="sng">
+                      <a:solidFill>
+                        <a:srgbClr val="E5E7EB"/>
+                      </a:solidFill>
+                    </a:lnT>
+                    <a:lnB w="6350" cap="flat" cmpd="sng">
+                      <a:solidFill>
+                        <a:srgbClr val="E5E7EB"/>
+                      </a:solidFill>
+                    </a:lnB>
+                  </a:tcPr>
+                </a:tc>
+                <a:tc>
+                  <a:txBody>
+                    <a:bodyPr/>
+                    <a:lstStyle/>
+                    <a:p>
+                      <a:pPr algn="ctr"/>
+                      <a:r>
+                        <a:rPr sz="800">
+                          <a:latin typeface="Segoe UI"/>
+                        </a:rPr>
+                        <a:t/>
+                      </a:r>
+                    </a:p>
+                  </a:txBody>
+                  <a:tcPr marL="114300" marR="91425" marT="45700" marB="45700">
+                    <a:solidFill>
+                      <a:srgbClr val="F5F3FF"/>
+                    </a:solidFill>
+                    <a:lnL w="6350" cap="flat" cmpd="sng">
+                      <a:solidFill>
+                        <a:srgbClr val="E5E7EB"/>
+                      </a:solidFill>
+                    </a:lnL>
+                    <a:lnR w="6350" cap="flat" cmpd="sng">
+                      <a:solidFill>
+                        <a:srgbClr val="E5E7EB"/>
+                      </a:solidFill>
+                    </a:lnR>
+                    <a:lnT w="6350" cap="flat" cmpd="sng">
+                      <a:solidFill>
+                        <a:srgbClr val="E5E7EB"/>
+                      </a:solidFill>
+                    </a:lnT>
+                    <a:lnB w="6350" cap="flat" cmpd="sng">
+                      <a:solidFill>
+                        <a:srgbClr val="E5E7EB"/>
+                      </a:solidFill>
+                    </a:lnB>
+                  </a:tcPr>
+                </a:tc>
+              </a:tr>
+              <a:tr h="274320">
+                <a:tc>
+                  <a:txBody>
+                    <a:bodyPr/>
+                    <a:lstStyle/>
+                    <a:p>
+                      <a:pPr algn="l"/>
+                      <a:r>
+                        <a:rPr sz="900" b="1">
+                          <a:latin typeface="Georgia"/>
+                        </a:rPr>
+                        <a:t>Binds</a:t>
+                      </a:r>
+                    </a:p>
+                  </a:txBody>
+                  <a:tcPr marL="114300" marR="91425" marT="45700" marB="45700">
+                    <a:lnL w="6350" cap="flat" cmpd="sng">
+                      <a:solidFill>
+                        <a:srgbClr val="E5E7EB"/>
+                      </a:solidFill>
+                    </a:lnL>
+                    <a:lnR w="6350" cap="flat" cmpd="sng">
+                      <a:solidFill>
+                        <a:srgbClr val="E5E7EB"/>
+                      </a:solidFill>
+                    </a:lnR>
+                    <a:lnT w="6350" cap="flat" cmpd="sng">
+                      <a:solidFill>
+                        <a:srgbClr val="E5E7EB"/>
+                      </a:solidFill>
+                    </a:lnT>
+                    <a:lnB w="6350" cap="flat" cmpd="sng">
+                      <a:solidFill>
+                        <a:srgbClr val="E5E7EB"/>
+                      </a:solidFill>
+                    </a:lnB>
+                  </a:tcPr>
+                </a:tc>
+                <a:tc>
+                  <a:txBody>
+                    <a:bodyPr/>
+                    <a:lstStyle/>
+                    <a:p>
+                      <a:pPr algn="ctr"/>
+                      <a:r>
+                        <a:rPr sz="800">
+                          <a:latin typeface="Segoe UI"/>
+                        </a:rPr>
+                        <a:t>30</a:t>
+                      </a:r>
+                    </a:p>
+                  </a:txBody>
+                  <a:tcPr marL="114300" marR="91425" marT="45700" marB="45700">
+                    <a:lnL w="6350" cap="flat" cmpd="sng">
+                      <a:solidFill>
+                        <a:srgbClr val="E5E7EB"/>
+                      </a:solidFill>
+                    </a:lnL>
+                    <a:lnR w="6350" cap="flat" cmpd="sng">
+                      <a:solidFill>
+                        <a:srgbClr val="E5E7EB"/>
+                      </a:solidFill>
+                    </a:lnR>
+                    <a:lnT w="6350" cap="flat" cmpd="sng">
+                      <a:solidFill>
+                        <a:srgbClr val="E5E7EB"/>
+                      </a:solidFill>
+                    </a:lnT>
+                    <a:lnB w="6350" cap="flat" cmpd="sng">
+                      <a:solidFill>
+                        <a:srgbClr val="E5E7EB"/>
+                      </a:solidFill>
+                    </a:lnB>
+                  </a:tcPr>
+                </a:tc>
+                <a:tc>
+                  <a:txBody>
+                    <a:bodyPr/>
+                    <a:lstStyle/>
+                    <a:p>
+                      <a:pPr algn="ctr"/>
+                      <a:r>
+                        <a:rPr sz="800">
+                          <a:solidFill>
+                            <a:srgbClr val="059669"/>
+                          </a:solidFill>
+                          <a:latin typeface="Segoe UI"/>
+                        </a:rPr>
+                        <a:t>31</a:t>
+                      </a:r>
+                    </a:p>
+                  </a:txBody>
+                  <a:tcPr marL="114300" marR="91425" marT="45700" marB="45700">
+                    <a:lnL w="6350" cap="flat" cmpd="sng">
+                      <a:solidFill>
+                        <a:srgbClr val="E5E7EB"/>
+                      </a:solidFill>
+                    </a:lnL>
+                    <a:lnR w="6350" cap="flat" cmpd="sng">
+                      <a:solidFill>
+                        <a:srgbClr val="E5E7EB"/>
+                      </a:solidFill>
+                    </a:lnR>
+                    <a:lnT w="6350" cap="flat" cmpd="sng">
+                      <a:solidFill>
+                        <a:srgbClr val="E5E7EB"/>
+                      </a:solidFill>
+                    </a:lnT>
+                    <a:lnB w="6350" cap="flat" cmpd="sng">
+                      <a:solidFill>
+                        <a:srgbClr val="E5E7EB"/>
+                      </a:solidFill>
+                    </a:lnB>
+                  </a:tcPr>
+                </a:tc>
+                <a:tc>
+                  <a:txBody>
+                    <a:bodyPr/>
+                    <a:lstStyle/>
+                    <a:p>
+                      <a:pPr algn="ctr"/>
+                      <a:r>
+                        <a:rPr sz="800">
+                          <a:latin typeface="Segoe UI"/>
+                        </a:rPr>
+                        <a:t>35</a:t>
+                      </a:r>
+                    </a:p>
+                  </a:txBody>
+                  <a:tcPr marL="114300" marR="91425" marT="45700" marB="45700">
                     <a:lnL w="6350" cap="flat" cmpd="sng">
                       <a:solidFill>
                         <a:srgbClr val="E5E7EB"/>
@@ -4707,283 +4983,7 @@
                           </a:solidFill>
                           <a:latin typeface="Segoe UI"/>
                         </a:rPr>
-                        <a:t>16.1%</a:t>
-                      </a:r>
-                    </a:p>
-                  </a:txBody>
-                  <a:tcPr marL="114300" marR="91425" marT="45700" marB="45700">
-                    <a:solidFill>
-                      <a:srgbClr val="F5F3FF"/>
-                    </a:solidFill>
-                    <a:lnL w="6350" cap="flat" cmpd="sng">
-                      <a:solidFill>
-                        <a:srgbClr val="E5E7EB"/>
-                      </a:solidFill>
-                    </a:lnL>
-                    <a:lnR w="6350" cap="flat" cmpd="sng">
-                      <a:solidFill>
-                        <a:srgbClr val="E5E7EB"/>
-                      </a:solidFill>
-                    </a:lnR>
-                    <a:lnT w="6350" cap="flat" cmpd="sng">
-                      <a:solidFill>
-                        <a:srgbClr val="E5E7EB"/>
-                      </a:solidFill>
-                    </a:lnT>
-                    <a:lnB w="6350" cap="flat" cmpd="sng">
-                      <a:solidFill>
-                        <a:srgbClr val="E5E7EB"/>
-                      </a:solidFill>
-                    </a:lnB>
-                  </a:tcPr>
-                </a:tc>
-                <a:tc>
-                  <a:txBody>
-                    <a:bodyPr/>
-                    <a:lstStyle/>
-                    <a:p>
-                      <a:pPr algn="ctr"/>
-                      <a:r>
-                        <a:rPr sz="800">
-                          <a:latin typeface="Segoe UI"/>
-                        </a:rPr>
-                        <a:t>27.7%</a:t>
-                      </a:r>
-                    </a:p>
-                  </a:txBody>
-                  <a:tcPr marL="114300" marR="91425" marT="45700" marB="45700">
-                    <a:solidFill>
-                      <a:srgbClr val="F5F3FF"/>
-                    </a:solidFill>
-                    <a:lnL w="6350" cap="flat" cmpd="sng">
-                      <a:solidFill>
-                        <a:srgbClr val="E5E7EB"/>
-                      </a:solidFill>
-                    </a:lnL>
-                    <a:lnR w="6350" cap="flat" cmpd="sng">
-                      <a:solidFill>
-                        <a:srgbClr val="E5E7EB"/>
-                      </a:solidFill>
-                    </a:lnR>
-                    <a:lnT w="6350" cap="flat" cmpd="sng">
-                      <a:solidFill>
-                        <a:srgbClr val="E5E7EB"/>
-                      </a:solidFill>
-                    </a:lnT>
-                    <a:lnB w="6350" cap="flat" cmpd="sng">
-                      <a:solidFill>
-                        <a:srgbClr val="E5E7EB"/>
-                      </a:solidFill>
-                    </a:lnB>
-                  </a:tcPr>
-                </a:tc>
-                <a:tc>
-                  <a:txBody>
-                    <a:bodyPr/>
-                    <a:lstStyle/>
-                    <a:p>
-                      <a:pPr algn="ctr"/>
-                      <a:r>
-                        <a:rPr sz="800">
-                          <a:latin typeface="Segoe UI"/>
-                        </a:rPr>
-                        <a:t/>
-                      </a:r>
-                    </a:p>
-                  </a:txBody>
-                  <a:tcPr marL="114300" marR="91425" marT="45700" marB="45700">
-                    <a:solidFill>
-                      <a:srgbClr val="F5F3FF"/>
-                    </a:solidFill>
-                    <a:lnL w="6350" cap="flat" cmpd="sng">
-                      <a:solidFill>
-                        <a:srgbClr val="E5E7EB"/>
-                      </a:solidFill>
-                    </a:lnL>
-                    <a:lnR w="6350" cap="flat" cmpd="sng">
-                      <a:solidFill>
-                        <a:srgbClr val="E5E7EB"/>
-                      </a:solidFill>
-                    </a:lnR>
-                    <a:lnT w="6350" cap="flat" cmpd="sng">
-                      <a:solidFill>
-                        <a:srgbClr val="E5E7EB"/>
-                      </a:solidFill>
-                    </a:lnT>
-                    <a:lnB w="6350" cap="flat" cmpd="sng">
-                      <a:solidFill>
-                        <a:srgbClr val="E5E7EB"/>
-                      </a:solidFill>
-                    </a:lnB>
-                  </a:tcPr>
-                </a:tc>
-              </a:tr>
-              <a:tr h="274320">
-                <a:tc>
-                  <a:txBody>
-                    <a:bodyPr/>
-                    <a:lstStyle/>
-                    <a:p>
-                      <a:pPr algn="l"/>
-                      <a:r>
-                        <a:rPr sz="900" b="1">
-                          <a:latin typeface="Georgia"/>
-                        </a:rPr>
-                        <a:t>Binds</a:t>
-                      </a:r>
-                    </a:p>
-                  </a:txBody>
-                  <a:tcPr marL="114300" marR="91425" marT="45700" marB="45700">
-                    <a:lnL w="6350" cap="flat" cmpd="sng">
-                      <a:solidFill>
-                        <a:srgbClr val="E5E7EB"/>
-                      </a:solidFill>
-                    </a:lnL>
-                    <a:lnR w="6350" cap="flat" cmpd="sng">
-                      <a:solidFill>
-                        <a:srgbClr val="E5E7EB"/>
-                      </a:solidFill>
-                    </a:lnR>
-                    <a:lnT w="6350" cap="flat" cmpd="sng">
-                      <a:solidFill>
-                        <a:srgbClr val="E5E7EB"/>
-                      </a:solidFill>
-                    </a:lnT>
-                    <a:lnB w="6350" cap="flat" cmpd="sng">
-                      <a:solidFill>
-                        <a:srgbClr val="E5E7EB"/>
-                      </a:solidFill>
-                    </a:lnB>
-                  </a:tcPr>
-                </a:tc>
-                <a:tc>
-                  <a:txBody>
-                    <a:bodyPr/>
-                    <a:lstStyle/>
-                    <a:p>
-                      <a:pPr algn="ctr"/>
-                      <a:r>
-                        <a:rPr sz="800">
-                          <a:latin typeface="Segoe UI"/>
-                        </a:rPr>
-                        <a:t>30</a:t>
-                      </a:r>
-                    </a:p>
-                  </a:txBody>
-                  <a:tcPr marL="114300" marR="91425" marT="45700" marB="45700">
-                    <a:lnL w="6350" cap="flat" cmpd="sng">
-                      <a:solidFill>
-                        <a:srgbClr val="E5E7EB"/>
-                      </a:solidFill>
-                    </a:lnL>
-                    <a:lnR w="6350" cap="flat" cmpd="sng">
-                      <a:solidFill>
-                        <a:srgbClr val="E5E7EB"/>
-                      </a:solidFill>
-                    </a:lnR>
-                    <a:lnT w="6350" cap="flat" cmpd="sng">
-                      <a:solidFill>
-                        <a:srgbClr val="E5E7EB"/>
-                      </a:solidFill>
-                    </a:lnT>
-                    <a:lnB w="6350" cap="flat" cmpd="sng">
-                      <a:solidFill>
-                        <a:srgbClr val="E5E7EB"/>
-                      </a:solidFill>
-                    </a:lnB>
-                  </a:tcPr>
-                </a:tc>
-                <a:tc>
-                  <a:txBody>
-                    <a:bodyPr/>
-                    <a:lstStyle/>
-                    <a:p>
-                      <a:pPr algn="ctr"/>
-                      <a:r>
-                        <a:rPr sz="800">
-                          <a:solidFill>
-                            <a:srgbClr val="DC2626"/>
-                          </a:solidFill>
-                          <a:latin typeface="Segoe UI"/>
-                        </a:rPr>
-                        <a:t>29</a:t>
-                      </a:r>
-                    </a:p>
-                  </a:txBody>
-                  <a:tcPr marL="114300" marR="91425" marT="45700" marB="45700">
-                    <a:lnL w="6350" cap="flat" cmpd="sng">
-                      <a:solidFill>
-                        <a:srgbClr val="E5E7EB"/>
-                      </a:solidFill>
-                    </a:lnL>
-                    <a:lnR w="6350" cap="flat" cmpd="sng">
-                      <a:solidFill>
-                        <a:srgbClr val="E5E7EB"/>
-                      </a:solidFill>
-                    </a:lnR>
-                    <a:lnT w="6350" cap="flat" cmpd="sng">
-                      <a:solidFill>
-                        <a:srgbClr val="E5E7EB"/>
-                      </a:solidFill>
-                    </a:lnT>
-                    <a:lnB w="6350" cap="flat" cmpd="sng">
-                      <a:solidFill>
-                        <a:srgbClr val="E5E7EB"/>
-                      </a:solidFill>
-                    </a:lnB>
-                  </a:tcPr>
-                </a:tc>
-                <a:tc>
-                  <a:txBody>
-                    <a:bodyPr/>
-                    <a:lstStyle/>
-                    <a:p>
-                      <a:pPr algn="ctr"/>
-                      <a:r>
-                        <a:rPr sz="800">
-                          <a:latin typeface="Segoe UI"/>
-                        </a:rPr>
-                        <a:t>34</a:t>
-                      </a:r>
-                    </a:p>
-                  </a:txBody>
-                  <a:tcPr marL="114300" marR="91425" marT="45700" marB="45700">
-                    <a:lnL w="6350" cap="flat" cmpd="sng">
-                      <a:solidFill>
-                        <a:srgbClr val="E5E7EB"/>
-                      </a:solidFill>
-                    </a:lnL>
-                    <a:lnR w="6350" cap="flat" cmpd="sng">
-                      <a:solidFill>
-                        <a:srgbClr val="E5E7EB"/>
-                      </a:solidFill>
-                    </a:lnR>
-                    <a:lnT w="6350" cap="flat" cmpd="sng">
-                      <a:solidFill>
-                        <a:srgbClr val="E5E7EB"/>
-                      </a:solidFill>
-                    </a:lnT>
-                    <a:lnB w="6350" cap="flat" cmpd="sng">
-                      <a:solidFill>
-                        <a:srgbClr val="E5E7EB"/>
-                      </a:solidFill>
-                    </a:lnB>
-                  </a:tcPr>
-                </a:tc>
-                <a:tc>
-                  <a:txBody>
-                    <a:bodyPr/>
-                    <a:lstStyle/>
-                    <a:p>
-                      <a:pPr algn="ctr"/>
-                      <a:r>
-                        <a:rPr sz="800">
-                          <a:solidFill>
-                            <a:srgbClr val="DC2626"/>
-                          </a:solidFill>
-                          <a:latin typeface="Segoe UI"/>
-                        </a:rPr>
-                        <a:t>22</a:t>
+                        <a:t>20</a:t>
                       </a:r>
                     </a:p>
                   </a:txBody>

--- a/generated/Tier 1 Broker Scorecards/Safeline Insurance Agency, Inc._Broker_Scorecard.pptx
+++ b/generated/Tier 1 Broker Scorecards/Safeline Insurance Agency, Inc._Broker_Scorecard.pptx
@@ -3357,7 +3357,7 @@
                         <a:rPr sz="800">
                           <a:latin typeface="Segoe UI"/>
                         </a:rPr>
-                        <a:t>$5,475,694.67 / $8,802,772.23 / $4,503,942.53</a:t>
+                        <a:t>$5,475,694.67 / $8,804,326.78 / $4,505,497.08</a:t>
                       </a:r>
                     </a:p>
                   </a:txBody>
@@ -3394,7 +3394,7 @@
                         <a:rPr sz="900">
                           <a:latin typeface="Segoe UI"/>
                         </a:rPr>
-                        <a:t>Tier 1  |  10.29% / 15.00%</a:t>
+                        <a:t>Tier 1  |  10.19% / 15.00%</a:t>
                       </a:r>
                     </a:p>
                   </a:txBody>
@@ -3653,7 +3653,7 @@
                         <a:rPr sz="900">
                           <a:latin typeface="Segoe UI"/>
                         </a:rPr>
-                        <a:t>Fleet Subs: 74  |  Binds: 14</a:t>
+                        <a:t>Fleet Subs: 75  |  Binds: 15</a:t>
                       </a:r>
                     </a:p>
                   </a:txBody>
@@ -3690,7 +3690,7 @@
                         <a:rPr sz="900">
                           <a:latin typeface="Segoe UI"/>
                         </a:rPr>
-                        <a:t>Fleet Bound Premium: $2,639,269.70</a:t>
+                        <a:t>Fleet Bound Premium: $2,772,650.52</a:t>
                       </a:r>
                     </a:p>
                   </a:txBody>
@@ -3727,7 +3727,7 @@
                         <a:rPr sz="900">
                           <a:latin typeface="Segoe UI"/>
                         </a:rPr>
-                        <a:t>Fleet Book %: 58.6%</a:t>
+                        <a:t>Fleet Book %: 61.5%</a:t>
                       </a:r>
                     </a:p>
                   </a:txBody>
@@ -3766,7 +3766,7 @@
                         <a:rPr sz="900">
                           <a:latin typeface="Segoe UI"/>
                         </a:rPr>
-                        <a:t>Non-Fleet Subs: 606  |  Binds: 56</a:t>
+                        <a:t>Non-Fleet Subs: 612  |  Binds: 55</a:t>
                       </a:r>
                     </a:p>
                   </a:txBody>
@@ -3803,7 +3803,7 @@
                         <a:rPr sz="900">
                           <a:latin typeface="Segoe UI"/>
                         </a:rPr>
-                        <a:t>Non-Fleet Bound Premium: $1,864,672.83</a:t>
+                        <a:t>Non-Fleet Bound Premium: $1,732,846.56</a:t>
                       </a:r>
                     </a:p>
                   </a:txBody>
@@ -3840,7 +3840,7 @@
                         <a:rPr sz="900">
                           <a:latin typeface="Segoe UI"/>
                         </a:rPr>
-                        <a:t>Non-Fleet Book %: 41.4%</a:t>
+                        <a:t>Non-Fleet Book %: 38.5%</a:t>
                       </a:r>
                     </a:p>
                   </a:txBody>
@@ -4311,7 +4311,7 @@
                         <a:rPr sz="800">
                           <a:latin typeface="Segoe UI"/>
                         </a:rPr>
-                        <a:t>163</a:t>
+                        <a:t>162</a:t>
                       </a:r>
                     </a:p>
                   </a:txBody>
@@ -4428,7 +4428,7 @@
                           </a:solidFill>
                           <a:latin typeface="Segoe UI"/>
                         </a:rPr>
-                        <a:t>143</a:t>
+                        <a:t>150</a:t>
                       </a:r>
                     </a:p>
                   </a:txBody>
@@ -4581,7 +4581,7 @@
                         <a:rPr sz="800">
                           <a:latin typeface="Segoe UI"/>
                         </a:rPr>
-                        <a:t>18.4%</a:t>
+                        <a:t>17.9%</a:t>
                       </a:r>
                     </a:p>
                   </a:txBody>
@@ -4664,7 +4664,7 @@
                         <a:rPr sz="800">
                           <a:latin typeface="Segoe UI"/>
                         </a:rPr>
-                        <a:t>28.2%</a:t>
+                        <a:t>27.4%</a:t>
                       </a:r>
                     </a:p>
                   </a:txBody>
@@ -4707,7 +4707,7 @@
                           </a:solidFill>
                           <a:latin typeface="Segoe UI"/>
                         </a:rPr>
-                        <a:t>14.0%</a:t>
+                        <a:t>13.3%</a:t>
                       </a:r>
                     </a:p>
                   </a:txBody>
@@ -4866,7 +4866,7 @@
                         <a:rPr sz="800">
                           <a:latin typeface="Segoe UI"/>
                         </a:rPr>
-                        <a:t>30</a:t>
+                        <a:t>29</a:t>
                       </a:r>
                     </a:p>
                   </a:txBody>
@@ -4943,7 +4943,7 @@
                         <a:rPr sz="800">
                           <a:latin typeface="Segoe UI"/>
                         </a:rPr>
-                        <a:t>35</a:t>
+                        <a:t>34</a:t>
                       </a:r>
                     </a:p>
                   </a:txBody>
@@ -5262,7 +5262,7 @@
                           </a:solidFill>
                           <a:latin typeface="Segoe UI"/>
                         </a:rPr>
-                        <a:t>$468.3K</a:t>
+                        <a:t>$469.8K</a:t>
                       </a:r>
                     </a:p>
                   </a:txBody>

--- a/generated/Tier 1 Broker Scorecards/Safeline Insurance Agency, Inc._Broker_Scorecard.pptx
+++ b/generated/Tier 1 Broker Scorecards/Safeline Insurance Agency, Inc._Broker_Scorecard.pptx
@@ -3357,7 +3357,7 @@
                         <a:rPr sz="800">
                           <a:latin typeface="Segoe UI"/>
                         </a:rPr>
-                        <a:t>$5,475,694.67 / $8,804,326.78 / $4,505,497.08</a:t>
+                        <a:t>$5,475,694.67 / $8,775,028.83 / $4,476,199.13</a:t>
                       </a:r>
                     </a:p>
                   </a:txBody>
@@ -3394,7 +3394,7 @@
                         <a:rPr sz="900">
                           <a:latin typeface="Segoe UI"/>
                         </a:rPr>
-                        <a:t>Tier 1  |  10.19% / 15.00%</a:t>
+                        <a:t>Tier 1  |  9.99% / 15.00%</a:t>
                       </a:r>
                     </a:p>
                   </a:txBody>
@@ -3431,7 +3431,7 @@
                         <a:rPr sz="900">
                           <a:latin typeface="Segoe UI"/>
                         </a:rPr>
-                        <a:t>$7,665,972.54  (58.8% achieved)</a:t>
+                        <a:t>$7,665,972.54  (58.4% achieved)</a:t>
                       </a:r>
                     </a:p>
                   </a:txBody>
@@ -3653,7 +3653,7 @@
                         <a:rPr sz="900">
                           <a:latin typeface="Segoe UI"/>
                         </a:rPr>
-                        <a:t>Fleet Subs: 75  |  Binds: 15</a:t>
+                        <a:t>Fleet Subs: 76  |  Binds: 13</a:t>
                       </a:r>
                     </a:p>
                   </a:txBody>
@@ -3690,7 +3690,7 @@
                         <a:rPr sz="900">
                           <a:latin typeface="Segoe UI"/>
                         </a:rPr>
-                        <a:t>Fleet Bound Premium: $2,772,650.52</a:t>
+                        <a:t>Fleet Bound Premium: $2,488,735.74</a:t>
                       </a:r>
                     </a:p>
                   </a:txBody>
@@ -3727,7 +3727,7 @@
                         <a:rPr sz="900">
                           <a:latin typeface="Segoe UI"/>
                         </a:rPr>
-                        <a:t>Fleet Book %: 61.5%</a:t>
+                        <a:t>Fleet Book %: 55.6%</a:t>
                       </a:r>
                     </a:p>
                   </a:txBody>
@@ -3766,7 +3766,7 @@
                         <a:rPr sz="900">
                           <a:latin typeface="Segoe UI"/>
                         </a:rPr>
-                        <a:t>Non-Fleet Subs: 612  |  Binds: 55</a:t>
+                        <a:t>Non-Fleet Subs: 625  |  Binds: 57</a:t>
                       </a:r>
                     </a:p>
                   </a:txBody>
@@ -3803,7 +3803,7 @@
                         <a:rPr sz="900">
                           <a:latin typeface="Segoe UI"/>
                         </a:rPr>
-                        <a:t>Non-Fleet Bound Premium: $1,732,846.56</a:t>
+                        <a:t>Non-Fleet Bound Premium: $1,987,463.39</a:t>
                       </a:r>
                     </a:p>
                   </a:txBody>
@@ -3840,7 +3840,7 @@
                         <a:rPr sz="900">
                           <a:latin typeface="Segoe UI"/>
                         </a:rPr>
-                        <a:t>Non-Fleet Book %: 38.5%</a:t>
+                        <a:t>Non-Fleet Book %: 44.4%</a:t>
                       </a:r>
                     </a:p>
                   </a:txBody>
@@ -4428,7 +4428,7 @@
                           </a:solidFill>
                           <a:latin typeface="Segoe UI"/>
                         </a:rPr>
-                        <a:t>150</a:t>
+                        <a:t>167</a:t>
                       </a:r>
                     </a:p>
                   </a:txBody>
@@ -4581,7 +4581,7 @@
                         <a:rPr sz="800">
                           <a:latin typeface="Segoe UI"/>
                         </a:rPr>
-                        <a:t>17.9%</a:t>
+                        <a:t>18.5%</a:t>
                       </a:r>
                     </a:p>
                   </a:txBody>
@@ -4620,7 +4620,7 @@
                       <a:r>
                         <a:rPr sz="800">
                           <a:solidFill>
-                            <a:srgbClr val="059669"/>
+                            <a:srgbClr val="DC2626"/>
                           </a:solidFill>
                           <a:latin typeface="Segoe UI"/>
                         </a:rPr>
@@ -4707,7 +4707,7 @@
                           </a:solidFill>
                           <a:latin typeface="Segoe UI"/>
                         </a:rPr>
-                        <a:t>13.3%</a:t>
+                        <a:t>13.2%</a:t>
                       </a:r>
                     </a:p>
                   </a:txBody>
@@ -4866,7 +4866,7 @@
                         <a:rPr sz="800">
                           <a:latin typeface="Segoe UI"/>
                         </a:rPr>
-                        <a:t>29</a:t>
+                        <a:t>30</a:t>
                       </a:r>
                     </a:p>
                   </a:txBody>
@@ -4983,7 +4983,7 @@
                           </a:solidFill>
                           <a:latin typeface="Segoe UI"/>
                         </a:rPr>
-                        <a:t>20</a:t>
+                        <a:t>22</a:t>
                       </a:r>
                     </a:p>
                   </a:txBody>
@@ -5258,11 +5258,11 @@
                       <a:r>
                         <a:rPr sz="800" b="1">
                           <a:solidFill>
-                            <a:srgbClr val="059669"/>
+                            <a:srgbClr val="DC2626"/>
                           </a:solidFill>
                           <a:latin typeface="Segoe UI"/>
                         </a:rPr>
-                        <a:t>$469.8K</a:t>
+                        <a:t>$440.5K</a:t>
                       </a:r>
                     </a:p>
                   </a:txBody>

--- a/generated/Tier 1 Broker Scorecards/Safeline Insurance Agency, Inc._Broker_Scorecard.pptx
+++ b/generated/Tier 1 Broker Scorecards/Safeline Insurance Agency, Inc._Broker_Scorecard.pptx
@@ -3357,7 +3357,7 @@
                         <a:rPr sz="800">
                           <a:latin typeface="Segoe UI"/>
                         </a:rPr>
-                        <a:t>$5,475,694.67 / $8,775,028.83 / $4,476,199.13</a:t>
+                        <a:t>$5,475,694.67 / $8,792,064.58 / $4,493,234.88</a:t>
                       </a:r>
                     </a:p>
                   </a:txBody>
@@ -3394,7 +3394,7 @@
                         <a:rPr sz="900">
                           <a:latin typeface="Segoe UI"/>
                         </a:rPr>
-                        <a:t>Tier 1  |  9.99% / 15.00%</a:t>
+                        <a:t>Tier 1  |  10.10% / 15.00%</a:t>
                       </a:r>
                     </a:p>
                   </a:txBody>
@@ -3431,7 +3431,7 @@
                         <a:rPr sz="900">
                           <a:latin typeface="Segoe UI"/>
                         </a:rPr>
-                        <a:t>$7,665,972.54  (58.4% achieved)</a:t>
+                        <a:t>$7,665,972.54  (58.6% achieved)</a:t>
                       </a:r>
                     </a:p>
                   </a:txBody>
@@ -3690,7 +3690,7 @@
                         <a:rPr sz="900">
                           <a:latin typeface="Segoe UI"/>
                         </a:rPr>
-                        <a:t>Fleet Bound Premium: $2,488,735.74</a:t>
+                        <a:t>Fleet Bound Premium: $2,484,259.81</a:t>
                       </a:r>
                     </a:p>
                   </a:txBody>
@@ -3727,7 +3727,7 @@
                         <a:rPr sz="900">
                           <a:latin typeface="Segoe UI"/>
                         </a:rPr>
-                        <a:t>Fleet Book %: 55.6%</a:t>
+                        <a:t>Fleet Book %: 55.3%</a:t>
                       </a:r>
                     </a:p>
                   </a:txBody>
@@ -3766,7 +3766,7 @@
                         <a:rPr sz="900">
                           <a:latin typeface="Segoe UI"/>
                         </a:rPr>
-                        <a:t>Non-Fleet Subs: 625  |  Binds: 57</a:t>
+                        <a:t>Non-Fleet Subs: 627  |  Binds: 58</a:t>
                       </a:r>
                     </a:p>
                   </a:txBody>
@@ -3803,7 +3803,7 @@
                         <a:rPr sz="900">
                           <a:latin typeface="Segoe UI"/>
                         </a:rPr>
-                        <a:t>Non-Fleet Bound Premium: $1,987,463.39</a:t>
+                        <a:t>Non-Fleet Bound Premium: $2,008,975.07</a:t>
                       </a:r>
                     </a:p>
                   </a:txBody>
@@ -3840,7 +3840,7 @@
                         <a:rPr sz="900">
                           <a:latin typeface="Segoe UI"/>
                         </a:rPr>
-                        <a:t>Non-Fleet Book %: 44.4%</a:t>
+                        <a:t>Non-Fleet Book %: 44.7%</a:t>
                       </a:r>
                     </a:p>
                   </a:txBody>
@@ -4311,7 +4311,7 @@
                         <a:rPr sz="800">
                           <a:latin typeface="Segoe UI"/>
                         </a:rPr>
-                        <a:t>162</a:t>
+                        <a:t>163</a:t>
                       </a:r>
                     </a:p>
                   </a:txBody>
@@ -4428,7 +4428,7 @@
                           </a:solidFill>
                           <a:latin typeface="Segoe UI"/>
                         </a:rPr>
-                        <a:t>167</a:t>
+                        <a:t>169</a:t>
                       </a:r>
                     </a:p>
                   </a:txBody>
@@ -4581,7 +4581,90 @@
                         <a:rPr sz="800">
                           <a:latin typeface="Segoe UI"/>
                         </a:rPr>
+                        <a:t>18.4%</a:t>
+                      </a:r>
+                    </a:p>
+                  </a:txBody>
+                  <a:tcPr marL="114300" marR="91425" marT="45700" marB="45700">
+                    <a:solidFill>
+                      <a:srgbClr val="F5F3FF"/>
+                    </a:solidFill>
+                    <a:lnL w="6350" cap="flat" cmpd="sng">
+                      <a:solidFill>
+                        <a:srgbClr val="E5E7EB"/>
+                      </a:solidFill>
+                    </a:lnL>
+                    <a:lnR w="6350" cap="flat" cmpd="sng">
+                      <a:solidFill>
+                        <a:srgbClr val="E5E7EB"/>
+                      </a:solidFill>
+                    </a:lnR>
+                    <a:lnT w="6350" cap="flat" cmpd="sng">
+                      <a:solidFill>
+                        <a:srgbClr val="E5E7EB"/>
+                      </a:solidFill>
+                    </a:lnT>
+                    <a:lnB w="6350" cap="flat" cmpd="sng">
+                      <a:solidFill>
+                        <a:srgbClr val="E5E7EB"/>
+                      </a:solidFill>
+                    </a:lnB>
+                  </a:tcPr>
+                </a:tc>
+                <a:tc>
+                  <a:txBody>
+                    <a:bodyPr/>
+                    <a:lstStyle/>
+                    <a:p>
+                      <a:pPr algn="ctr"/>
+                      <a:r>
+                        <a:rPr sz="800">
+                          <a:solidFill>
+                            <a:srgbClr val="059669"/>
+                          </a:solidFill>
+                          <a:latin typeface="Segoe UI"/>
+                        </a:rPr>
                         <a:t>18.5%</a:t>
+                      </a:r>
+                    </a:p>
+                  </a:txBody>
+                  <a:tcPr marL="114300" marR="91425" marT="45700" marB="45700">
+                    <a:solidFill>
+                      <a:srgbClr val="F5F3FF"/>
+                    </a:solidFill>
+                    <a:lnL w="6350" cap="flat" cmpd="sng">
+                      <a:solidFill>
+                        <a:srgbClr val="E5E7EB"/>
+                      </a:solidFill>
+                    </a:lnL>
+                    <a:lnR w="6350" cap="flat" cmpd="sng">
+                      <a:solidFill>
+                        <a:srgbClr val="E5E7EB"/>
+                      </a:solidFill>
+                    </a:lnR>
+                    <a:lnT w="6350" cap="flat" cmpd="sng">
+                      <a:solidFill>
+                        <a:srgbClr val="E5E7EB"/>
+                      </a:solidFill>
+                    </a:lnT>
+                    <a:lnB w="6350" cap="flat" cmpd="sng">
+                      <a:solidFill>
+                        <a:srgbClr val="E5E7EB"/>
+                      </a:solidFill>
+                    </a:lnB>
+                  </a:tcPr>
+                </a:tc>
+                <a:tc>
+                  <a:txBody>
+                    <a:bodyPr/>
+                    <a:lstStyle/>
+                    <a:p>
+                      <a:pPr algn="ctr"/>
+                      <a:r>
+                        <a:rPr sz="800">
+                          <a:latin typeface="Segoe UI"/>
+                        </a:rPr>
+                        <a:t>28.2%</a:t>
                       </a:r>
                     </a:p>
                   </a:txBody>
@@ -4624,90 +4707,7 @@
                           </a:solidFill>
                           <a:latin typeface="Segoe UI"/>
                         </a:rPr>
-                        <a:t>18.5%</a:t>
-                      </a:r>
-                    </a:p>
-                  </a:txBody>
-                  <a:tcPr marL="114300" marR="91425" marT="45700" marB="45700">
-                    <a:solidFill>
-                      <a:srgbClr val="F5F3FF"/>
-                    </a:solidFill>
-                    <a:lnL w="6350" cap="flat" cmpd="sng">
-                      <a:solidFill>
-                        <a:srgbClr val="E5E7EB"/>
-                      </a:solidFill>
-                    </a:lnL>
-                    <a:lnR w="6350" cap="flat" cmpd="sng">
-                      <a:solidFill>
-                        <a:srgbClr val="E5E7EB"/>
-                      </a:solidFill>
-                    </a:lnR>
-                    <a:lnT w="6350" cap="flat" cmpd="sng">
-                      <a:solidFill>
-                        <a:srgbClr val="E5E7EB"/>
-                      </a:solidFill>
-                    </a:lnT>
-                    <a:lnB w="6350" cap="flat" cmpd="sng">
-                      <a:solidFill>
-                        <a:srgbClr val="E5E7EB"/>
-                      </a:solidFill>
-                    </a:lnB>
-                  </a:tcPr>
-                </a:tc>
-                <a:tc>
-                  <a:txBody>
-                    <a:bodyPr/>
-                    <a:lstStyle/>
-                    <a:p>
-                      <a:pPr algn="ctr"/>
-                      <a:r>
-                        <a:rPr sz="800">
-                          <a:latin typeface="Segoe UI"/>
-                        </a:rPr>
-                        <a:t>27.4%</a:t>
-                      </a:r>
-                    </a:p>
-                  </a:txBody>
-                  <a:tcPr marL="114300" marR="91425" marT="45700" marB="45700">
-                    <a:solidFill>
-                      <a:srgbClr val="F5F3FF"/>
-                    </a:solidFill>
-                    <a:lnL w="6350" cap="flat" cmpd="sng">
-                      <a:solidFill>
-                        <a:srgbClr val="E5E7EB"/>
-                      </a:solidFill>
-                    </a:lnL>
-                    <a:lnR w="6350" cap="flat" cmpd="sng">
-                      <a:solidFill>
-                        <a:srgbClr val="E5E7EB"/>
-                      </a:solidFill>
-                    </a:lnR>
-                    <a:lnT w="6350" cap="flat" cmpd="sng">
-                      <a:solidFill>
-                        <a:srgbClr val="E5E7EB"/>
-                      </a:solidFill>
-                    </a:lnT>
-                    <a:lnB w="6350" cap="flat" cmpd="sng">
-                      <a:solidFill>
-                        <a:srgbClr val="E5E7EB"/>
-                      </a:solidFill>
-                    </a:lnB>
-                  </a:tcPr>
-                </a:tc>
-                <a:tc>
-                  <a:txBody>
-                    <a:bodyPr/>
-                    <a:lstStyle/>
-                    <a:p>
-                      <a:pPr algn="ctr"/>
-                      <a:r>
-                        <a:rPr sz="800">
-                          <a:solidFill>
-                            <a:srgbClr val="DC2626"/>
-                          </a:solidFill>
-                          <a:latin typeface="Segoe UI"/>
-                        </a:rPr>
-                        <a:t>13.2%</a:t>
+                        <a:t>13.6%</a:t>
                       </a:r>
                     </a:p>
                   </a:txBody>
@@ -4943,7 +4943,7 @@
                         <a:rPr sz="800">
                           <a:latin typeface="Segoe UI"/>
                         </a:rPr>
-                        <a:t>34</a:t>
+                        <a:t>35</a:t>
                       </a:r>
                     </a:p>
                   </a:txBody>
@@ -4983,7 +4983,7 @@
                           </a:solidFill>
                           <a:latin typeface="Segoe UI"/>
                         </a:rPr>
-                        <a:t>22</a:t>
+                        <a:t>23</a:t>
                       </a:r>
                     </a:p>
                   </a:txBody>
@@ -5258,11 +5258,11 @@
                       <a:r>
                         <a:rPr sz="800" b="1">
                           <a:solidFill>
-                            <a:srgbClr val="DC2626"/>
+                            <a:srgbClr val="059669"/>
                           </a:solidFill>
                           <a:latin typeface="Segoe UI"/>
                         </a:rPr>
-                        <a:t>$440.5K</a:t>
+                        <a:t>$457.5K</a:t>
                       </a:r>
                     </a:p>
                   </a:txBody>

--- a/generated/Tier 1 Broker Scorecards/Safeline Insurance Agency, Inc._Broker_Scorecard.pptx
+++ b/generated/Tier 1 Broker Scorecards/Safeline Insurance Agency, Inc._Broker_Scorecard.pptx
@@ -3357,7 +3357,7 @@
                         <a:rPr sz="800">
                           <a:latin typeface="Segoe UI"/>
                         </a:rPr>
-                        <a:t>$5,475,694.67 / $8,792,064.58 / $4,493,234.88</a:t>
+                        <a:t>$5,475,694.67 / $8,342,722.83 / $4,493,234.88</a:t>
                       </a:r>
                     </a:p>
                   </a:txBody>
@@ -4311,7 +4311,7 @@
                         <a:rPr sz="800">
                           <a:latin typeface="Segoe UI"/>
                         </a:rPr>
-                        <a:t>163</a:t>
+                        <a:t>162</a:t>
                       </a:r>
                     </a:p>
                   </a:txBody>
@@ -4581,7 +4581,7 @@
                         <a:rPr sz="800">
                           <a:latin typeface="Segoe UI"/>
                         </a:rPr>
-                        <a:t>18.4%</a:t>
+                        <a:t>18.5%</a:t>
                       </a:r>
                     </a:p>
                   </a:txBody>
@@ -4620,7 +4620,7 @@
                       <a:r>
                         <a:rPr sz="800">
                           <a:solidFill>
-                            <a:srgbClr val="059669"/>
+                            <a:srgbClr val="DC2626"/>
                           </a:solidFill>
                           <a:latin typeface="Segoe UI"/>
                         </a:rPr>
@@ -4664,7 +4664,7 @@
                         <a:rPr sz="800">
                           <a:latin typeface="Segoe UI"/>
                         </a:rPr>
-                        <a:t>28.2%</a:t>
+                        <a:t>27.4%</a:t>
                       </a:r>
                     </a:p>
                   </a:txBody>
@@ -4943,7 +4943,7 @@
                         <a:rPr sz="800">
                           <a:latin typeface="Segoe UI"/>
                         </a:rPr>
-                        <a:t>35</a:t>
+                        <a:t>34</a:t>
                       </a:r>
                     </a:p>
                   </a:txBody>
